--- a/week-05/presentations/ppts/day-03-rest-soap-api-fundamentals.pptx
+++ b/week-05/presentations/ppts/day-03-rest-soap-api-fundamentals.pptx
@@ -1447,7 +1447,7 @@
             </a:pPr>
             <a:r>
               <a:rPr/>
-              <a:t>By 16:00, every triad has TMD §3 with the API contract.</a:t>
+              <a:t>By 16:00, every triad has TMD Section 3 with the API contract.</a:t>
             </a:r>
           </a:p>
         </p:txBody>
@@ -6225,7 +6225,7 @@
             </a:pPr>
             <a:r>
               <a:rPr/>
-              <a:t>🧿 AI Critique Prompt</a:t>
+              <a:t>🤖 AI Critique Prompt</a:t>
             </a:r>
           </a:p>
         </p:txBody>
@@ -6411,7 +6411,7 @@
             </a:pPr>
             <a:r>
               <a:rPr/>
-              <a:t>10 min: polish §3 + provenance</a:t>
+              <a:t>10 min: polish Section 3 + provenance</a:t>
             </a:r>
           </a:p>
           <a:p>
@@ -6546,7 +6546,7 @@
             </a:pPr>
             <a:r>
               <a:rPr/>
-              <a:t>TMD §3 drafted</a:t>
+              <a:t>TMD Section 3 drafted</a:t>
             </a:r>
           </a:p>
           <a:p>
@@ -6591,7 +6591,7 @@
             </a:pPr>
             <a:r>
               <a:rPr/>
-              <a:t>Bring to Day 4: TMD §§1–3. Tomorrow we draw the sequences end-to-end.</a:t>
+              <a:t>Bring to Day 4: TMD Sections 1–3. Tomorrow we draw the sequences end-to-end.</a:t>
             </a:r>
           </a:p>
         </p:txBody>
@@ -6900,7 +6900,7 @@
             </a:pPr>
             <a:r>
               <a:rPr/>
-              <a:t>Pin TMD §§1–2; recap REST principles</a:t>
+              <a:t>Pin TMD Sections 1–2; recap REST principles</a:t>
             </a:r>
           </a:p>
           <a:p>

--- a/week-05/presentations/ppts/day-03-rest-soap-api-fundamentals.pptx
+++ b/week-05/presentations/ppts/day-03-rest-soap-api-fundamentals.pptx
@@ -5262,6 +5262,31 @@
           </a:p>
         </p:txBody>
       </p:sp>
+      <p:sp>
+        <p:nvSpPr>
+          <p:cNvPr id="3" name="Content Placeholder 2"/>
+          <p:cNvSpPr>
+            <a:spLocks noGrp="1"/>
+          </p:cNvSpPr>
+          <p:nvPr>
+            <p:ph idx="1"/>
+          </p:nvPr>
+        </p:nvSpPr>
+        <p:spPr/>
+        <p:txBody>
+          <a:bodyPr/>
+          <a:lstStyle/>
+          <a:p>
+            <a:pPr lvl="0" indent="0" marL="0">
+              <a:buNone/>
+            </a:pPr>
+            <a:r>
+              <a:rPr/>
+              <a:t>The Authorization header carries a single sign-on (SSO) token.</a:t>
+            </a:r>
+          </a:p>
+        </p:txBody>
+      </p:sp>
     </p:spTree>
   </p:cSld>
 </p:sld>
@@ -6151,7 +6176,7 @@
             </a:pPr>
             <a:r>
               <a:rPr/>
-              <a:t>Integration partner only speaks SOAP (banks, government, EDI-adjacent)</a:t>
+              <a:t>Integration partner only speaks SOAP (banks, government, Electronic Data Interchange (EDI)-adjacent)</a:t>
             </a:r>
           </a:p>
           <a:p>
@@ -6546,7 +6571,7 @@
             </a:pPr>
             <a:r>
               <a:rPr/>
-              <a:t>TMD Section 3 drafted</a:t>
+              <a:t>Technical Modeling Document (TMD) Section 3 drafted</a:t>
             </a:r>
           </a:p>
           <a:p>

--- a/week-05/presentations/ppts/day-03-rest-soap-api-fundamentals.pptx
+++ b/week-05/presentations/ppts/day-03-rest-soap-api-fundamentals.pptx
@@ -5277,6 +5277,32 @@
           <a:bodyPr/>
           <a:lstStyle/>
           <a:p>
+            <a:pPr lvl="0" indent="0">
+              <a:buNone/>
+            </a:pPr>
+            <a:r>
+              <a:rPr>
+                <a:latin typeface="Courier"/>
+              </a:rPr>
+              <a:t>POST /v1/dispatchers/{dispatcher_id}/reconcile-events
+Headers:
+Authorization: Bearer &lt;SSO JWT, scope: reconcile.write&gt;
+Idempotency-Key: &lt;client UUID&gt;
+Body:
+ticket_ids: UUID[] (1..100)
+submitted_at: ISO 8601 timestamp
+client_metadata: { user_agent, location }
+Responses:
+201 Created — { id, ticket_ids, submitted_at }
+400 Validation error — { error.code, fields[] }
+401 Missing/invalid token
+403 Token lacks reconcile.write scope
+409 Idempotency-Key conflict
+422 Tickets ineligible
+429 Rate limited — Retry-After: &lt;seconds&gt;</a:t>
+            </a:r>
+          </a:p>
+          <a:p>
             <a:pPr lvl="0" indent="0" marL="0">
               <a:buNone/>
             </a:pPr>
@@ -5886,6 +5912,27 @@
           <a:bodyPr/>
           <a:lstStyle/>
           <a:p>
+            <a:pPr lvl="0" indent="0">
+              <a:buNone/>
+            </a:pPr>
+            <a:r>
+              <a:rPr>
+                <a:latin typeface="Courier"/>
+              </a:rPr>
+              <a:t>{
+"error": {
+"code": "ticket_not_eligible",
+"message": "Ticket cannot be reconciled in current state",
+"fields": [
+{"name": "ticket_ids[3]", "reason": "ticket already reconciled"}
+]
+},
+"request_id": "req_01H...",
+"documentation_url": "https://docs.../errors/ticket_not_eligible"
+}</a:t>
+            </a:r>
+          </a:p>
+          <a:p>
             <a:pPr lvl="0" indent="0" marL="0">
               <a:buNone/>
             </a:pPr>
@@ -6251,6 +6298,42 @@
             <a:r>
               <a:rPr/>
               <a:t>🤖 AI Critique Prompt</a:t>
+            </a:r>
+          </a:p>
+        </p:txBody>
+      </p:sp>
+      <p:sp>
+        <p:nvSpPr>
+          <p:cNvPr id="3" name="Content Placeholder 2"/>
+          <p:cNvSpPr>
+            <a:spLocks noGrp="1"/>
+          </p:cNvSpPr>
+          <p:nvPr>
+            <p:ph idx="1"/>
+          </p:nvPr>
+        </p:nvSpPr>
+        <p:spPr/>
+        <p:txBody>
+          <a:bodyPr/>
+          <a:lstStyle/>
+          <a:p>
+            <a:pPr lvl="0" indent="0">
+              <a:buNone/>
+            </a:pPr>
+            <a:r>
+              <a:rPr>
+                <a:latin typeface="Courier"/>
+              </a:rPr>
+              <a:t>Role: API design reviewer with strong REST opinions.
+Context: &lt;paste URL paths, methods, status codes, error body
+shape, idempotency approach, versioning strategy&gt;
+Task: Identify the top 5 issues in this API contract.
+Constraints:
+- Be specific: cite the path, method, or convention
+- For each, suggest the correction
+- Avoid pedantic preferences (singular/plural is fine
+if consistent)
+Format: Numbered — Issue / What's wrong / Fix.</a:t>
             </a:r>
           </a:p>
         </p:txBody>

--- a/week-05/presentations/ppts/day-03-rest-soap-api-fundamentals.pptx
+++ b/week-05/presentations/ppts/day-03-rest-soap-api-fundamentals.pptx
@@ -627,7 +627,7 @@
             </a:pPr>
             <a:r>
               <a:rPr/>
-              <a:t>If a triad uses verbs in URLs, redirect to nouns. Standard rookie error.</a:t>
+              <a:t>If a quad uses verbs in URLs, redirect to nouns. Standard rookie error.</a:t>
             </a:r>
           </a:p>
         </p:txBody>
@@ -1037,7 +1037,7 @@
             </a:pPr>
             <a:r>
               <a:rPr/>
-              <a:t>Push back on triads who “don’t need versioning yet.” They will. Pick a strategy now.</a:t>
+              <a:t>Push back on quads who “don’t need versioning yet.” They will. Pick a strategy now.</a:t>
             </a:r>
           </a:p>
         </p:txBody>
@@ -1447,7 +1447,7 @@
             </a:pPr>
             <a:r>
               <a:rPr/>
-              <a:t>By 16:00, every triad has TMD Section 3 with the API contract.</a:t>
+              <a:t>By 16:00, every quad has TMD Section 3 with the API contract.</a:t>
             </a:r>
           </a:p>
         </p:txBody>
@@ -1775,7 +1775,7 @@
             </a:pPr>
             <a:r>
               <a:rPr/>
-              <a:t>Resource modeling is the foundation. Verbs in URLs are the classic rookie error — calibrate the eye in Block 1 before triads design their own endpoints.</a:t>
+              <a:t>Resource modeling is the foundation. Verbs in URLs are the classic rookie error — calibrate the eye in Block 1 before quads design their own endpoints.</a:t>
             </a:r>
           </a:p>
         </p:txBody>
@@ -2103,7 +2103,7 @@
             </a:pPr>
             <a:r>
               <a:rPr/>
-              <a:t>Triads convert yesterday’s entity model into endpoints. The shape must trace to access patterns; if it doesn’t, the data model gets re-examined.</a:t>
+              <a:t>Quads convert yesterday’s entity model into endpoints. The shape must trace to access patterns; if it doesn’t, the data model gets re-examined.</a:t>
             </a:r>
           </a:p>
         </p:txBody>
@@ -5383,7 +5383,7 @@
             </a:pPr>
             <a:r>
               <a:rPr b="1"/>
-              <a:t>Triads • 40 minutes</a:t>
+              <a:t>Quads • 40 minutes</a:t>
             </a:r>
           </a:p>
           <a:p>
@@ -6040,7 +6040,7 @@
             </a:pPr>
             <a:r>
               <a:rPr b="1"/>
-              <a:t>Triads • 40 minutes</a:t>
+              <a:t>Quads • 40 minutes</a:t>
             </a:r>
           </a:p>
           <a:p>
@@ -6483,7 +6483,7 @@
             </a:pPr>
             <a:r>
               <a:rPr b="1"/>
-              <a:t>Triads • 45 minutes • Wrap</a:t>
+              <a:t>Quads • 45 minutes • Wrap</a:t>
             </a:r>
           </a:p>
           <a:p>
@@ -7887,7 +7887,7 @@
             </a:pPr>
             <a:r>
               <a:rPr b="1"/>
-              <a:t>Triads • 35 minutes</a:t>
+              <a:t>Quads • 35 minutes</a:t>
             </a:r>
           </a:p>
           <a:p>

--- a/week-05/presentations/ppts/day-03-rest-soap-api-fundamentals.pptx
+++ b/week-05/presentations/ppts/day-03-rest-soap-api-fundamentals.pptx
@@ -5383,7 +5383,7 @@
             </a:pPr>
             <a:r>
               <a:rPr b="1"/>
-              <a:t>Quads • 40 minutes</a:t>
+              <a:t>Quads • 50 minutes</a:t>
             </a:r>
           </a:p>
           <a:p>
@@ -6040,7 +6040,7 @@
             </a:pPr>
             <a:r>
               <a:rPr b="1"/>
-              <a:t>Quads • 40 minutes</a:t>
+              <a:t>Quads • 50 minutes</a:t>
             </a:r>
           </a:p>
           <a:p>
@@ -6483,7 +6483,7 @@
             </a:pPr>
             <a:r>
               <a:rPr b="1"/>
-              <a:t>Quads • 45 minutes • Wrap</a:t>
+              <a:t>Quads • 55 minutes • Wrap</a:t>
             </a:r>
           </a:p>
           <a:p>
@@ -7887,7 +7887,7 @@
             </a:pPr>
             <a:r>
               <a:rPr b="1"/>
-              <a:t>Quads • 35 minutes</a:t>
+              <a:t>Quads • 45 minutes</a:t>
             </a:r>
           </a:p>
           <a:p>

--- a/week-05/presentations/ppts/day-03-rest-soap-api-fundamentals.pptx
+++ b/week-05/presentations/ppts/day-03-rest-soap-api-fundamentals.pptx
@@ -5392,7 +5392,7 @@
             </a:pPr>
             <a:r>
               <a:rPr/>
-              <a:t>10 min: list resources from data model</a:t>
+              <a:t>20 min: list resources from data model</a:t>
             </a:r>
           </a:p>
           <a:p>
@@ -5428,7 +5428,7 @@
             </a:pPr>
             <a:r>
               <a:rPr/>
-              <a:t>⏱ 10 + 10 + 10 + 10</a:t>
+              <a:t>⏱ 20 + 10 + 10 + 10</a:t>
             </a:r>
           </a:p>
         </p:txBody>
@@ -6049,7 +6049,7 @@
             </a:pPr>
             <a:r>
               <a:rPr/>
-              <a:t>15 min: idempotency per mutating endpoint + window</a:t>
+              <a:t>25 min: idempotency per mutating endpoint + window</a:t>
             </a:r>
           </a:p>
           <a:p>
@@ -6076,7 +6076,7 @@
             </a:pPr>
             <a:r>
               <a:rPr/>
-              <a:t>⏱ 15 + 10 + 15</a:t>
+              <a:t>⏱ 25 + 10 + 15</a:t>
             </a:r>
           </a:p>
         </p:txBody>
@@ -6492,7 +6492,7 @@
             </a:pPr>
             <a:r>
               <a:rPr/>
-              <a:t>10 min: SOAP question — any partner needs it?</a:t>
+              <a:t>25 min: SOAP question — any partner needs it?</a:t>
             </a:r>
           </a:p>
           <a:p>
@@ -6528,7 +6528,7 @@
             </a:pPr>
             <a:r>
               <a:rPr/>
-              <a:t>⏱ 10 + 10 + 10 + 10 · 15-min wrap</a:t>
+              <a:t>⏱ 25 + 10 + 10 + 10 · 15-min wrap</a:t>
             </a:r>
           </a:p>
         </p:txBody>
@@ -7905,7 +7905,7 @@
             </a:pPr>
             <a:r>
               <a:rPr/>
-              <a:t>10 min: sketch resources + URLs</a:t>
+              <a:t>20 min: sketch resources + URLs</a:t>
             </a:r>
           </a:p>
           <a:p>
@@ -7941,7 +7941,7 @@
             </a:pPr>
             <a:r>
               <a:rPr/>
-              <a:t>⏱ 10 + 10 + 10 + 5</a:t>
+              <a:t>⏱ 20 + 10 + 10 + 5</a:t>
             </a:r>
           </a:p>
         </p:txBody>
